--- a/presentations/b16-people/B16_People_Narrated.pptx
+++ b/presentations/b16-people/B16_People_Narrated.pptx
@@ -187,7 +187,7 @@
     </p:spTree>
     <p:extLst>
       <p:ext uri="{BB962C8B-B14F-4D97-AF65-F5344CB8AC3E}">
-        <p14:creationId xmlns:p14="http://schemas.microsoft.com/office/powerpoint/2010/main" val="3114016424"/>
+        <p14:creationId xmlns:p14="http://schemas.microsoft.com/office/powerpoint/2010/main" val="3282999903"/>
       </p:ext>
     </p:extLst>
   </p:cSld>
@@ -2518,7 +2518,7 @@
             <a:hlinkClick r:id="" action="ppaction://media"/>
             <a:extLst>
               <a:ext uri="{FF2B5EF4-FFF2-40B4-BE49-F238E27FC236}">
-                <a16:creationId xmlns:a16="http://schemas.microsoft.com/office/drawing/2014/main" id="{15E4867C-2039-CC2D-7741-5DE91DD33680}"/>
+                <a16:creationId xmlns:a16="http://schemas.microsoft.com/office/drawing/2014/main" id="{5966B439-74F3-D19C-C558-4F36A8497326}"/>
               </a:ext>
             </a:extLst>
           </p:cNvPr>
@@ -2534,7 +2534,7 @@
                     <p:ext uri="{3AFAAA56-56D3-431D-BCD4-E75A35582382}">
                       <p173:tracksInfo xmlns:p173="http://schemas.microsoft.com/office/powerpoint/2017/3/main" displayLoc="slide">
                         <p173:trackLst>
-                          <p173:track id="{B4029060-F367-48F7-8CAB-1547BE341C93}" label="English (captions)" lang="en-US" r:embed="rId6"/>
+                          <p173:track id="{BE43FB03-6C28-4AB8-B202-56CDD391F2FF}" label="English (captions)" lang="en-US" r:embed="rId6"/>
                         </p173:trackLst>
                       </p173:tracksInfo>
                     </p:ext>
@@ -2552,7 +2552,7 @@
         </p:blipFill>
         <p:spPr>
           <a:xfrm>
-            <a:off x="127000" y="6350000"/>
+            <a:off x="12446000" y="127000"/>
             <a:ext cx="304800" cy="304800"/>
           </a:xfrm>
           <a:prstGeom prst="rect">
@@ -3793,7 +3793,7 @@
             <a:hlinkClick r:id="" action="ppaction://media"/>
             <a:extLst>
               <a:ext uri="{FF2B5EF4-FFF2-40B4-BE49-F238E27FC236}">
-                <a16:creationId xmlns:a16="http://schemas.microsoft.com/office/drawing/2014/main" id="{885F22D0-F080-405F-F2C0-AF3CB84094A7}"/>
+                <a16:creationId xmlns:a16="http://schemas.microsoft.com/office/drawing/2014/main" id="{6E0CDE49-8162-2CCB-98DD-A8B70EB3AEA4}"/>
               </a:ext>
             </a:extLst>
           </p:cNvPr>
@@ -3809,7 +3809,7 @@
                     <p:ext uri="{3AFAAA56-56D3-431D-BCD4-E75A35582382}">
                       <p173:tracksInfo xmlns:p173="http://schemas.microsoft.com/office/powerpoint/2017/3/main" displayLoc="slide">
                         <p173:trackLst>
-                          <p173:track id="{DB6BAC57-F087-4223-A574-26FECC87B390}" label="English (captions)" lang="en-US" r:embed="rId8"/>
+                          <p173:track id="{88DABBBC-D1DD-4D81-8BEA-E9BEE6F8E115}" label="English (captions)" lang="en-US" r:embed="rId8"/>
                         </p173:trackLst>
                       </p173:tracksInfo>
                     </p:ext>
@@ -3827,7 +3827,7 @@
         </p:blipFill>
         <p:spPr>
           <a:xfrm>
-            <a:off x="127000" y="6350000"/>
+            <a:off x="12446000" y="127000"/>
             <a:ext cx="304800" cy="304800"/>
           </a:xfrm>
           <a:prstGeom prst="rect">
@@ -5215,7 +5215,7 @@
             <a:hlinkClick r:id="" action="ppaction://media"/>
             <a:extLst>
               <a:ext uri="{FF2B5EF4-FFF2-40B4-BE49-F238E27FC236}">
-                <a16:creationId xmlns:a16="http://schemas.microsoft.com/office/drawing/2014/main" id="{4440ACD3-66FD-0BC6-B36F-FD2599042D70}"/>
+                <a16:creationId xmlns:a16="http://schemas.microsoft.com/office/drawing/2014/main" id="{7FCD8DE5-A10E-89BF-8FF7-5B39066C98FD}"/>
               </a:ext>
             </a:extLst>
           </p:cNvPr>
@@ -5231,7 +5231,7 @@
                     <p:ext uri="{3AFAAA56-56D3-431D-BCD4-E75A35582382}">
                       <p173:tracksInfo xmlns:p173="http://schemas.microsoft.com/office/powerpoint/2017/3/main" displayLoc="slide">
                         <p173:trackLst>
-                          <p173:track id="{208E8372-4D30-4B61-A904-C08C8F139E78}" label="English (captions)" lang="en-US" r:embed="rId9"/>
+                          <p173:track id="{C4437C61-6CA2-4C02-AD35-278A987610B6}" label="English (captions)" lang="en-US" r:embed="rId9"/>
                         </p173:trackLst>
                       </p173:tracksInfo>
                     </p:ext>
@@ -5249,7 +5249,7 @@
         </p:blipFill>
         <p:spPr>
           <a:xfrm>
-            <a:off x="127000" y="6350000"/>
+            <a:off x="12446000" y="127000"/>
             <a:ext cx="304800" cy="304800"/>
           </a:xfrm>
           <a:prstGeom prst="rect">
@@ -6776,7 +6776,7 @@
             <a:hlinkClick r:id="" action="ppaction://media"/>
             <a:extLst>
               <a:ext uri="{FF2B5EF4-FFF2-40B4-BE49-F238E27FC236}">
-                <a16:creationId xmlns:a16="http://schemas.microsoft.com/office/drawing/2014/main" id="{3B117B14-4C13-7ED8-4C83-83B459E5BC81}"/>
+                <a16:creationId xmlns:a16="http://schemas.microsoft.com/office/drawing/2014/main" id="{DD39AF54-18AB-6D44-B9C2-00DD554D49E7}"/>
               </a:ext>
             </a:extLst>
           </p:cNvPr>
@@ -6792,7 +6792,7 @@
                     <p:ext uri="{3AFAAA56-56D3-431D-BCD4-E75A35582382}">
                       <p173:tracksInfo xmlns:p173="http://schemas.microsoft.com/office/powerpoint/2017/3/main" displayLoc="slide">
                         <p173:trackLst>
-                          <p173:track id="{FCA177DD-3C92-48C4-B292-DE123CEE03D3}" label="English (captions)" lang="en-US" r:embed="rId9"/>
+                          <p173:track id="{A2C72DDF-776D-4D2F-86A8-0A4AC668E703}" label="English (captions)" lang="en-US" r:embed="rId9"/>
                         </p173:trackLst>
                       </p173:tracksInfo>
                     </p:ext>
@@ -6810,7 +6810,7 @@
         </p:blipFill>
         <p:spPr>
           <a:xfrm>
-            <a:off x="127000" y="6350000"/>
+            <a:off x="12446000" y="127000"/>
             <a:ext cx="304800" cy="304800"/>
           </a:xfrm>
           <a:prstGeom prst="rect">
@@ -8272,7 +8272,7 @@
             <a:hlinkClick r:id="" action="ppaction://media"/>
             <a:extLst>
               <a:ext uri="{FF2B5EF4-FFF2-40B4-BE49-F238E27FC236}">
-                <a16:creationId xmlns:a16="http://schemas.microsoft.com/office/drawing/2014/main" id="{BA0F92A8-054B-5907-FE06-5B99130DA72D}"/>
+                <a16:creationId xmlns:a16="http://schemas.microsoft.com/office/drawing/2014/main" id="{9619E3E6-BA42-2E9A-5ACF-D5EB65FB2E5B}"/>
               </a:ext>
             </a:extLst>
           </p:cNvPr>
@@ -8288,7 +8288,7 @@
                     <p:ext uri="{3AFAAA56-56D3-431D-BCD4-E75A35582382}">
                       <p173:tracksInfo xmlns:p173="http://schemas.microsoft.com/office/powerpoint/2017/3/main" displayLoc="slide">
                         <p173:trackLst>
-                          <p173:track id="{CA740912-99B0-4375-8F56-8B3EE8C7548D}" label="English (captions)" lang="en-US" r:embed="rId8"/>
+                          <p173:track id="{E79998FB-3D53-4B91-A82C-2A8474416B2A}" label="English (captions)" lang="en-US" r:embed="rId8"/>
                         </p173:trackLst>
                       </p173:tracksInfo>
                     </p:ext>
@@ -8306,7 +8306,7 @@
         </p:blipFill>
         <p:spPr>
           <a:xfrm>
-            <a:off x="127000" y="6350000"/>
+            <a:off x="12446000" y="127000"/>
             <a:ext cx="304800" cy="304800"/>
           </a:xfrm>
           <a:prstGeom prst="rect">
@@ -9375,7 +9375,7 @@
             <a:hlinkClick r:id="" action="ppaction://media"/>
             <a:extLst>
               <a:ext uri="{FF2B5EF4-FFF2-40B4-BE49-F238E27FC236}">
-                <a16:creationId xmlns:a16="http://schemas.microsoft.com/office/drawing/2014/main" id="{65224A1B-9FAE-18BF-B85D-4AE2797D82B2}"/>
+                <a16:creationId xmlns:a16="http://schemas.microsoft.com/office/drawing/2014/main" id="{9773D623-9FE7-BD94-5CA7-F989DC7FBFE9}"/>
               </a:ext>
             </a:extLst>
           </p:cNvPr>
@@ -9391,7 +9391,7 @@
                     <p:ext uri="{3AFAAA56-56D3-431D-BCD4-E75A35582382}">
                       <p173:tracksInfo xmlns:p173="http://schemas.microsoft.com/office/powerpoint/2017/3/main" displayLoc="slide">
                         <p173:trackLst>
-                          <p173:track id="{908C2F93-1DC5-4CAB-89A7-A2260FDE523C}" label="English (captions)" lang="en-US" r:embed="rId11"/>
+                          <p173:track id="{65735D90-B173-4EF9-A0C6-F86E23DBCB19}" label="English (captions)" lang="en-US" r:embed="rId11"/>
                         </p173:trackLst>
                       </p173:tracksInfo>
                     </p:ext>
@@ -9409,7 +9409,7 @@
         </p:blipFill>
         <p:spPr>
           <a:xfrm>
-            <a:off x="127000" y="6350000"/>
+            <a:off x="12446000" y="127000"/>
             <a:ext cx="304800" cy="304800"/>
           </a:xfrm>
           <a:prstGeom prst="rect">
@@ -10358,7 +10358,7 @@
             <a:hlinkClick r:id="" action="ppaction://media"/>
             <a:extLst>
               <a:ext uri="{FF2B5EF4-FFF2-40B4-BE49-F238E27FC236}">
-                <a16:creationId xmlns:a16="http://schemas.microsoft.com/office/drawing/2014/main" id="{72119742-AD32-7364-DC19-8065F23E02F5}"/>
+                <a16:creationId xmlns:a16="http://schemas.microsoft.com/office/drawing/2014/main" id="{DFDEEBC5-4100-E0D7-E8C2-9509CBFC7864}"/>
               </a:ext>
             </a:extLst>
           </p:cNvPr>
@@ -10374,7 +10374,7 @@
                     <p:ext uri="{3AFAAA56-56D3-431D-BCD4-E75A35582382}">
                       <p173:tracksInfo xmlns:p173="http://schemas.microsoft.com/office/powerpoint/2017/3/main" displayLoc="slide">
                         <p173:trackLst>
-                          <p173:track id="{47D8C3A6-F418-477C-B1AA-7FD90F338333}" label="English (captions)" lang="en-US" r:embed="rId9"/>
+                          <p173:track id="{8429123A-9B35-4E27-91C6-EA748BBF01C3}" label="English (captions)" lang="en-US" r:embed="rId9"/>
                         </p173:trackLst>
                       </p173:tracksInfo>
                     </p:ext>
@@ -10392,7 +10392,7 @@
         </p:blipFill>
         <p:spPr>
           <a:xfrm>
-            <a:off x="127000" y="6350000"/>
+            <a:off x="12446000" y="127000"/>
             <a:ext cx="304800" cy="304800"/>
           </a:xfrm>
           <a:prstGeom prst="rect">
@@ -11341,7 +11341,7 @@
             <a:hlinkClick r:id="" action="ppaction://media"/>
             <a:extLst>
               <a:ext uri="{FF2B5EF4-FFF2-40B4-BE49-F238E27FC236}">
-                <a16:creationId xmlns:a16="http://schemas.microsoft.com/office/drawing/2014/main" id="{B655A09C-07A1-F4E3-8523-BB175B4D28EC}"/>
+                <a16:creationId xmlns:a16="http://schemas.microsoft.com/office/drawing/2014/main" id="{3F0EDD49-3B4B-B6DC-69D3-9805B70AA080}"/>
               </a:ext>
             </a:extLst>
           </p:cNvPr>
@@ -11357,7 +11357,7 @@
                     <p:ext uri="{3AFAAA56-56D3-431D-BCD4-E75A35582382}">
                       <p173:tracksInfo xmlns:p173="http://schemas.microsoft.com/office/powerpoint/2017/3/main" displayLoc="slide">
                         <p173:trackLst>
-                          <p173:track id="{A2DF6751-ADF0-4AEC-BD14-14C753343A9E}" label="English (captions)" lang="en-US" r:embed="rId9"/>
+                          <p173:track id="{687F0D10-F6FC-46FA-8AA2-482A69122C8B}" label="English (captions)" lang="en-US" r:embed="rId9"/>
                         </p173:trackLst>
                       </p173:tracksInfo>
                     </p:ext>
@@ -11375,7 +11375,7 @@
         </p:blipFill>
         <p:spPr>
           <a:xfrm>
-            <a:off x="127000" y="6350000"/>
+            <a:off x="12446000" y="127000"/>
             <a:ext cx="304800" cy="304800"/>
           </a:xfrm>
           <a:prstGeom prst="rect">
@@ -12962,7 +12962,7 @@
             <a:hlinkClick r:id="" action="ppaction://media"/>
             <a:extLst>
               <a:ext uri="{FF2B5EF4-FFF2-40B4-BE49-F238E27FC236}">
-                <a16:creationId xmlns:a16="http://schemas.microsoft.com/office/drawing/2014/main" id="{E6C280A7-590E-8EEF-F4C0-D41C32AF9809}"/>
+                <a16:creationId xmlns:a16="http://schemas.microsoft.com/office/drawing/2014/main" id="{C6D36487-B32C-3F6E-0895-FDB5DDAEC3AC}"/>
               </a:ext>
             </a:extLst>
           </p:cNvPr>
@@ -12978,7 +12978,7 @@
                     <p:ext uri="{3AFAAA56-56D3-431D-BCD4-E75A35582382}">
                       <p173:tracksInfo xmlns:p173="http://schemas.microsoft.com/office/powerpoint/2017/3/main" displayLoc="slide">
                         <p173:trackLst>
-                          <p173:track id="{76AF98C5-84E5-4584-83E5-04B7D64CC5E1}" label="English (captions)" lang="en-US" r:embed="rId8"/>
+                          <p173:track id="{4F96AA94-4F4F-4C15-94C9-7A9361BAB54C}" label="English (captions)" lang="en-US" r:embed="rId8"/>
                         </p173:trackLst>
                       </p173:tracksInfo>
                     </p:ext>
@@ -12996,7 +12996,7 @@
         </p:blipFill>
         <p:spPr>
           <a:xfrm>
-            <a:off x="127000" y="6350000"/>
+            <a:off x="12446000" y="127000"/>
             <a:ext cx="304800" cy="304800"/>
           </a:xfrm>
           <a:prstGeom prst="rect">
@@ -14439,7 +14439,7 @@
             <a:hlinkClick r:id="" action="ppaction://media"/>
             <a:extLst>
               <a:ext uri="{FF2B5EF4-FFF2-40B4-BE49-F238E27FC236}">
-                <a16:creationId xmlns:a16="http://schemas.microsoft.com/office/drawing/2014/main" id="{33720C44-BAC0-3CD4-ED4E-3F70705209BB}"/>
+                <a16:creationId xmlns:a16="http://schemas.microsoft.com/office/drawing/2014/main" id="{8BCAB1C0-A868-87D8-80C1-8FA10CA4581B}"/>
               </a:ext>
             </a:extLst>
           </p:cNvPr>
@@ -14455,7 +14455,7 @@
                     <p:ext uri="{3AFAAA56-56D3-431D-BCD4-E75A35582382}">
                       <p173:tracksInfo xmlns:p173="http://schemas.microsoft.com/office/powerpoint/2017/3/main" displayLoc="slide">
                         <p173:trackLst>
-                          <p173:track id="{D198AD8D-947D-4A5B-BB10-5858920452FB}" label="English (captions)" lang="en-US" r:embed="rId9"/>
+                          <p173:track id="{4AD6B6C2-CA16-41EF-992A-41410C184D1F}" label="English (captions)" lang="en-US" r:embed="rId9"/>
                         </p173:trackLst>
                       </p173:tracksInfo>
                     </p:ext>
@@ -14473,7 +14473,7 @@
         </p:blipFill>
         <p:spPr>
           <a:xfrm>
-            <a:off x="127000" y="6350000"/>
+            <a:off x="12446000" y="127000"/>
             <a:ext cx="304800" cy="304800"/>
           </a:xfrm>
           <a:prstGeom prst="rect">
@@ -17108,7 +17108,7 @@
             <a:hlinkClick r:id="" action="ppaction://media"/>
             <a:extLst>
               <a:ext uri="{FF2B5EF4-FFF2-40B4-BE49-F238E27FC236}">
-                <a16:creationId xmlns:a16="http://schemas.microsoft.com/office/drawing/2014/main" id="{0BC672F6-FE73-7E72-70B8-3E18D94EDB5C}"/>
+                <a16:creationId xmlns:a16="http://schemas.microsoft.com/office/drawing/2014/main" id="{3E4C2A1B-C8C0-4C0B-DB36-D05C6AC06D57}"/>
               </a:ext>
             </a:extLst>
           </p:cNvPr>
@@ -17124,7 +17124,7 @@
                     <p:ext uri="{3AFAAA56-56D3-431D-BCD4-E75A35582382}">
                       <p173:tracksInfo xmlns:p173="http://schemas.microsoft.com/office/powerpoint/2017/3/main" displayLoc="slide">
                         <p173:trackLst>
-                          <p173:track id="{B8A68240-F03E-478E-B3BF-2552A298A30E}" label="English (captions)" lang="en-US" r:embed="rId8"/>
+                          <p173:track id="{57A22729-5BE7-4EFF-BFEC-1E0C4D96DA5C}" label="English (captions)" lang="en-US" r:embed="rId8"/>
                         </p173:trackLst>
                       </p173:tracksInfo>
                     </p:ext>
@@ -17142,7 +17142,7 @@
         </p:blipFill>
         <p:spPr>
           <a:xfrm>
-            <a:off x="127000" y="6350000"/>
+            <a:off x="12446000" y="127000"/>
             <a:ext cx="304800" cy="304800"/>
           </a:xfrm>
           <a:prstGeom prst="rect">
@@ -18669,7 +18669,7 @@
             <a:hlinkClick r:id="" action="ppaction://media"/>
             <a:extLst>
               <a:ext uri="{FF2B5EF4-FFF2-40B4-BE49-F238E27FC236}">
-                <a16:creationId xmlns:a16="http://schemas.microsoft.com/office/drawing/2014/main" id="{9D8897A5-9267-3DAB-F3FF-A2EC117AEFE7}"/>
+                <a16:creationId xmlns:a16="http://schemas.microsoft.com/office/drawing/2014/main" id="{23D7F2ED-E42F-BD25-3D12-A9CC7B0B4189}"/>
               </a:ext>
             </a:extLst>
           </p:cNvPr>
@@ -18685,7 +18685,7 @@
                     <p:ext uri="{3AFAAA56-56D3-431D-BCD4-E75A35582382}">
                       <p173:tracksInfo xmlns:p173="http://schemas.microsoft.com/office/powerpoint/2017/3/main" displayLoc="slide">
                         <p173:trackLst>
-                          <p173:track id="{651ABE97-4E64-4130-9B7A-B510F86936DC}" label="English (captions)" lang="en-US" r:embed="rId9"/>
+                          <p173:track id="{CC4B84FC-A44C-444D-844B-E4353ACEC042}" label="English (captions)" lang="en-US" r:embed="rId9"/>
                         </p173:trackLst>
                       </p173:tracksInfo>
                     </p:ext>
@@ -18703,7 +18703,7 @@
         </p:blipFill>
         <p:spPr>
           <a:xfrm>
-            <a:off x="127000" y="6350000"/>
+            <a:off x="12446000" y="127000"/>
             <a:ext cx="304800" cy="304800"/>
           </a:xfrm>
           <a:prstGeom prst="rect">
@@ -19758,7 +19758,7 @@
             <a:hlinkClick r:id="" action="ppaction://media"/>
             <a:extLst>
               <a:ext uri="{FF2B5EF4-FFF2-40B4-BE49-F238E27FC236}">
-                <a16:creationId xmlns:a16="http://schemas.microsoft.com/office/drawing/2014/main" id="{633ECFBC-B526-C56D-E712-04DC35796490}"/>
+                <a16:creationId xmlns:a16="http://schemas.microsoft.com/office/drawing/2014/main" id="{AD32F094-23B0-A42D-205C-0F6C105F5D32}"/>
               </a:ext>
             </a:extLst>
           </p:cNvPr>
@@ -19774,7 +19774,7 @@
                     <p:ext uri="{3AFAAA56-56D3-431D-BCD4-E75A35582382}">
                       <p173:tracksInfo xmlns:p173="http://schemas.microsoft.com/office/powerpoint/2017/3/main" displayLoc="slide">
                         <p173:trackLst>
-                          <p173:track id="{B8469573-2745-4BE7-97C2-F1B20321D49C}" label="English (captions)" lang="en-US" r:embed="rId8"/>
+                          <p173:track id="{66353926-E741-47AC-A077-A53B0AF11ECD}" label="English (captions)" lang="en-US" r:embed="rId8"/>
                         </p173:trackLst>
                       </p173:tracksInfo>
                     </p:ext>
@@ -19792,7 +19792,7 @@
         </p:blipFill>
         <p:spPr>
           <a:xfrm>
-            <a:off x="127000" y="6350000"/>
+            <a:off x="12446000" y="127000"/>
             <a:ext cx="304800" cy="304800"/>
           </a:xfrm>
           <a:prstGeom prst="rect">
@@ -20741,7 +20741,7 @@
             <a:hlinkClick r:id="" action="ppaction://media"/>
             <a:extLst>
               <a:ext uri="{FF2B5EF4-FFF2-40B4-BE49-F238E27FC236}">
-                <a16:creationId xmlns:a16="http://schemas.microsoft.com/office/drawing/2014/main" id="{B0778868-FD91-0E9F-DF9D-445362F6F570}"/>
+                <a16:creationId xmlns:a16="http://schemas.microsoft.com/office/drawing/2014/main" id="{D4BCC706-26C4-961B-0BFF-6410516DAD09}"/>
               </a:ext>
             </a:extLst>
           </p:cNvPr>
@@ -20757,7 +20757,7 @@
                     <p:ext uri="{3AFAAA56-56D3-431D-BCD4-E75A35582382}">
                       <p173:tracksInfo xmlns:p173="http://schemas.microsoft.com/office/powerpoint/2017/3/main" displayLoc="slide">
                         <p173:trackLst>
-                          <p173:track id="{677A8F04-98E4-4F30-A471-5AF67A19EA41}" label="English (captions)" lang="en-US" r:embed="rId9"/>
+                          <p173:track id="{7F36CAB7-8733-4712-BD9C-E41ECCB9EB86}" label="English (captions)" lang="en-US" r:embed="rId9"/>
                         </p173:trackLst>
                       </p173:tracksInfo>
                     </p:ext>
@@ -20775,7 +20775,7 @@
         </p:blipFill>
         <p:spPr>
           <a:xfrm>
-            <a:off x="127000" y="6350000"/>
+            <a:off x="12446000" y="127000"/>
             <a:ext cx="304800" cy="304800"/>
           </a:xfrm>
           <a:prstGeom prst="rect">
